--- a/presentation/prompt-engineering-content.pptx
+++ b/presentation/prompt-engineering-content.pptx
@@ -128,6 +128,11 @@
       </a:defRPr>
     </a:lvl9pPr>
   </p:defaultTextStyle>
+  <p:extLst>
+    <p:ext uri="{EFAFB233-063F-42B5-8137-9DF3F51BA10A}">
+      <p15:sldGuideLst xmlns:p15="http://schemas.microsoft.com/office/powerpoint/2012/main"/>
+    </p:ext>
+  </p:extLst>
 </p:presentation>
 </file>
 
@@ -2570,12 +2575,12 @@
         <a:fontRef idx="minor"/>
       </dsp:style>
       <dsp:txBody>
-        <a:bodyPr spcFirstLastPara="0" vert="horz" wrap="square" lIns="160020" tIns="160020" rIns="160020" bIns="160020" numCol="1" spcCol="1270" anchor="t" anchorCtr="0">
+        <a:bodyPr spcFirstLastPara="0" vert="horz" wrap="square" lIns="144780" tIns="144780" rIns="144780" bIns="144780" numCol="1" spcCol="1270" anchor="t" anchorCtr="0">
           <a:noAutofit/>
         </a:bodyPr>
         <a:lstStyle/>
         <a:p>
-          <a:pPr marL="0" lvl="0" indent="0" algn="l" defTabSz="1866900">
+          <a:pPr marL="0" lvl="0" indent="0" algn="l" defTabSz="1689100">
             <a:lnSpc>
               <a:spcPct val="90000"/>
             </a:lnSpc>
@@ -2588,11 +2593,11 @@
             <a:buNone/>
           </a:pPr>
           <a:r>
-            <a:rPr lang="en-US" sz="4200" b="1" kern="1200"/>
+            <a:rPr lang="en-US" sz="3800" b="1" kern="1200"/>
             <a:t>Name</a:t>
           </a:r>
           <a:r>
-            <a:rPr lang="en-US" sz="4200" kern="1200"/>
+            <a:rPr lang="en-US" sz="3800" kern="1200"/>
             <a:t>: Eric Burcham</a:t>
           </a:r>
         </a:p>
@@ -2684,12 +2689,12 @@
         <a:fontRef idx="minor"/>
       </dsp:style>
       <dsp:txBody>
-        <a:bodyPr spcFirstLastPara="0" vert="horz" wrap="square" lIns="160020" tIns="160020" rIns="160020" bIns="160020" numCol="1" spcCol="1270" anchor="t" anchorCtr="0">
+        <a:bodyPr spcFirstLastPara="0" vert="horz" wrap="square" lIns="144780" tIns="144780" rIns="144780" bIns="144780" numCol="1" spcCol="1270" anchor="t" anchorCtr="0">
           <a:noAutofit/>
         </a:bodyPr>
         <a:lstStyle/>
         <a:p>
-          <a:pPr marL="0" lvl="0" indent="0" algn="l" defTabSz="1866900">
+          <a:pPr marL="0" lvl="0" indent="0" algn="l" defTabSz="1689100">
             <a:lnSpc>
               <a:spcPct val="90000"/>
             </a:lnSpc>
@@ -2702,11 +2707,11 @@
             <a:buNone/>
           </a:pPr>
           <a:r>
-            <a:rPr lang="en-US" sz="4200" b="1" kern="1200"/>
+            <a:rPr lang="en-US" sz="3800" b="1" kern="1200"/>
             <a:t>Title</a:t>
           </a:r>
           <a:r>
-            <a:rPr lang="en-US" sz="4200" kern="1200"/>
+            <a:rPr lang="en-US" sz="3800" kern="1200"/>
             <a:t>: Enterprise Architect</a:t>
           </a:r>
         </a:p>
@@ -2798,12 +2803,12 @@
         <a:fontRef idx="minor"/>
       </dsp:style>
       <dsp:txBody>
-        <a:bodyPr spcFirstLastPara="0" vert="horz" wrap="square" lIns="160020" tIns="160020" rIns="160020" bIns="160020" numCol="1" spcCol="1270" anchor="t" anchorCtr="0">
+        <a:bodyPr spcFirstLastPara="0" vert="horz" wrap="square" lIns="144780" tIns="144780" rIns="144780" bIns="144780" numCol="1" spcCol="1270" anchor="t" anchorCtr="0">
           <a:noAutofit/>
         </a:bodyPr>
         <a:lstStyle/>
         <a:p>
-          <a:pPr marL="0" lvl="0" indent="0" algn="l" defTabSz="1866900">
+          <a:pPr marL="0" lvl="0" indent="0" algn="l" defTabSz="1689100">
             <a:lnSpc>
               <a:spcPct val="90000"/>
             </a:lnSpc>
@@ -2816,20 +2821,20 @@
             <a:buNone/>
           </a:pPr>
           <a:r>
-            <a:rPr lang="en-US" sz="4200" b="1" kern="1200"/>
+            <a:rPr lang="en-US" sz="3800" b="1" kern="1200"/>
             <a:t>Email</a:t>
           </a:r>
           <a:r>
-            <a:rPr lang="en-US" sz="4200" kern="1200"/>
+            <a:rPr lang="en-US" sz="3800" kern="1200"/>
             <a:t>: </a:t>
           </a:r>
           <a:r>
-            <a:rPr lang="en-US" sz="4200" kern="1200">
+            <a:rPr lang="en-US" sz="3800" kern="1200">
               <a:hlinkClick xmlns:r="http://schemas.openxmlformats.org/officeDocument/2006/relationships" r:id="rId1"/>
             </a:rPr>
             <a:t>eburcham@eprod.com</a:t>
           </a:r>
-          <a:endParaRPr lang="en-US" sz="4200" kern="1200"/>
+          <a:endParaRPr lang="en-US" sz="3800" kern="1200"/>
         </a:p>
       </dsp:txBody>
       <dsp:txXfrm>
@@ -2919,12 +2924,12 @@
         <a:fontRef idx="minor"/>
       </dsp:style>
       <dsp:txBody>
-        <a:bodyPr spcFirstLastPara="0" vert="horz" wrap="square" lIns="160020" tIns="160020" rIns="160020" bIns="160020" numCol="1" spcCol="1270" anchor="t" anchorCtr="0">
+        <a:bodyPr spcFirstLastPara="0" vert="horz" wrap="square" lIns="144780" tIns="144780" rIns="144780" bIns="144780" numCol="1" spcCol="1270" anchor="t" anchorCtr="0">
           <a:noAutofit/>
         </a:bodyPr>
         <a:lstStyle/>
         <a:p>
-          <a:pPr marL="0" lvl="0" indent="0" algn="l" defTabSz="1866900">
+          <a:pPr marL="0" lvl="0" indent="0" algn="l" defTabSz="1689100">
             <a:lnSpc>
               <a:spcPct val="90000"/>
             </a:lnSpc>
@@ -2937,11 +2942,11 @@
             <a:buNone/>
           </a:pPr>
           <a:r>
-            <a:rPr lang="en-US" sz="4200" b="1" kern="1200"/>
+            <a:rPr lang="en-US" sz="3800" b="1" kern="1200"/>
             <a:t>Extension</a:t>
           </a:r>
           <a:r>
-            <a:rPr lang="en-US" sz="4200" kern="1200"/>
+            <a:rPr lang="en-US" sz="3800" kern="1200"/>
             <a:t>: 4103</a:t>
           </a:r>
         </a:p>
@@ -3033,12 +3038,12 @@
         <a:fontRef idx="minor"/>
       </dsp:style>
       <dsp:txBody>
-        <a:bodyPr spcFirstLastPara="0" vert="horz" wrap="square" lIns="160020" tIns="160020" rIns="160020" bIns="160020" numCol="1" spcCol="1270" anchor="t" anchorCtr="0">
+        <a:bodyPr spcFirstLastPara="0" vert="horz" wrap="square" lIns="144780" tIns="144780" rIns="144780" bIns="144780" numCol="1" spcCol="1270" anchor="t" anchorCtr="0">
           <a:noAutofit/>
         </a:bodyPr>
         <a:lstStyle/>
         <a:p>
-          <a:pPr marL="0" lvl="0" indent="0" algn="l" defTabSz="1866900">
+          <a:pPr marL="0" lvl="0" indent="0" algn="l" defTabSz="1689100">
             <a:lnSpc>
               <a:spcPct val="90000"/>
             </a:lnSpc>
@@ -3051,11 +3056,11 @@
             <a:buNone/>
           </a:pPr>
           <a:r>
-            <a:rPr lang="en-US" sz="4200" b="1" kern="1200"/>
+            <a:rPr lang="en-US" sz="3800" b="1" kern="1200"/>
             <a:t>Working Group</a:t>
           </a:r>
           <a:r>
-            <a:rPr lang="en-US" sz="4200" kern="1200"/>
+            <a:rPr lang="en-US" sz="3800" kern="1200"/>
             <a:t>: IT Applications</a:t>
           </a:r>
         </a:p>
@@ -8300,36 +8305,6 @@
           <a:bodyPr/>
           <a:lstStyle/>
           <a:p>
-            <a:r>
-              <a:rPr lang="en-US" dirty="0"/>
-              <a:t>On this slide we’ll cover some useful resources and work through more examples if we have time.</a:t>
-            </a:r>
-          </a:p>
-          <a:p>
-            <a:endParaRPr lang="en-US" dirty="0"/>
-          </a:p>
-          <a:p>
-            <a:r>
-              <a:rPr lang="en-US" b="1" dirty="0"/>
-              <a:t>Eric’s Prompt Library</a:t>
-            </a:r>
-            <a:r>
-              <a:rPr lang="en-US" b="0" dirty="0"/>
-              <a:t> – I have built you an example prompt library that covers basic prompt examples.  People can copy-and-paste them to quickly get started.</a:t>
-            </a:r>
-          </a:p>
-          <a:p>
-            <a:endParaRPr lang="en-US" b="0" dirty="0"/>
-          </a:p>
-          <a:p>
-            <a:r>
-              <a:rPr lang="en-US" b="1" dirty="0"/>
-              <a:t>References</a:t>
-            </a:r>
-            <a:r>
-              <a:rPr lang="en-US" b="0" dirty="0"/>
-              <a:t> – Google’s publication on prompt engineering, online courses, books, etc. will be shared with the group.</a:t>
-            </a:r>
             <a:endParaRPr lang="en-US" b="1" dirty="0"/>
           </a:p>
         </p:txBody>
@@ -18419,7 +18394,7 @@
         <p:spPr/>
         <p:txBody>
           <a:bodyPr>
-            <a:normAutofit fontScale="55000" lnSpcReduction="20000"/>
+            <a:normAutofit fontScale="92500"/>
           </a:bodyPr>
           <a:lstStyle/>
           <a:p>
@@ -18482,72 +18457,23 @@
             </a:pPr>
             <a:r>
               <a:rPr lang="en-US" b="1" dirty="0"/>
-              <a:t>Microsoft Privacy Statement</a:t>
-            </a:r>
+              <a:t>Prompt Engineering by Lee </a:t>
+            </a:r>
+            <a:r>
+              <a:rPr lang="en-US" b="1" dirty="0" err="1"/>
+              <a:t>Boonstra</a:t>
+            </a:r>
+            <a:endParaRPr lang="en-US" dirty="0"/>
           </a:p>
           <a:p>
             <a:pPr marL="0" indent="0">
               <a:buNone/>
             </a:pPr>
             <a:r>
-              <a:rPr lang="en-US" dirty="0">
+              <a:rPr lang="en-US" u="sng" dirty="0">
                 <a:hlinkClick r:id="rId5"/>
               </a:rPr>
-              <a:t>http://microsoft.com/en-us/privacy/privacystatement</a:t>
-            </a:r>
-            <a:endParaRPr lang="en-US" dirty="0"/>
-          </a:p>
-          <a:p>
-            <a:pPr marL="0" indent="0">
-              <a:buNone/>
-            </a:pPr>
-            <a:endParaRPr lang="en-US" dirty="0"/>
-          </a:p>
-          <a:p>
-            <a:pPr marL="0" indent="0">
-              <a:buNone/>
-            </a:pPr>
-            <a:r>
-              <a:rPr lang="en-US" b="1" dirty="0"/>
-              <a:t>Microsoft Privacy and Security Terms</a:t>
-            </a:r>
-          </a:p>
-          <a:p>
-            <a:pPr marL="0" indent="0">
-              <a:buNone/>
-            </a:pPr>
-            <a:r>
-              <a:rPr lang="en-US" dirty="0">
-                <a:hlinkClick r:id="rId6"/>
-              </a:rPr>
-              <a:t>https://www.microsoft.com/licensing/terms/product/PrivacyandSecurityTerms/MCA</a:t>
-            </a:r>
-            <a:endParaRPr lang="en-US" dirty="0"/>
-          </a:p>
-          <a:p>
-            <a:pPr marL="0" indent="0">
-              <a:buNone/>
-            </a:pPr>
-            <a:endParaRPr lang="en-US" dirty="0"/>
-          </a:p>
-          <a:p>
-            <a:pPr marL="0" indent="0">
-              <a:buNone/>
-            </a:pPr>
-            <a:r>
-              <a:rPr lang="en-US" b="1" dirty="0"/>
-              <a:t>Microsoft Copilot Chat FAQ</a:t>
-            </a:r>
-          </a:p>
-          <a:p>
-            <a:pPr marL="0" indent="0">
-              <a:buNone/>
-            </a:pPr>
-            <a:r>
-              <a:rPr lang="en-US" dirty="0">
-                <a:hlinkClick r:id="rId7"/>
-              </a:rPr>
-              <a:t>https://learn.microsoft.com/en-us/copilot/faq</a:t>
+              <a:t>https://www.innopreneur.io/wp-content/uploads/2025/04/22365_3_Prompt-Engineering_v7-1.pdf</a:t>
             </a:r>
             <a:endParaRPr lang="en-US" dirty="0"/>
           </a:p>
@@ -18923,250 +18849,6 @@
                                           <p:spTgt spid="3">
                                             <p:txEl>
                                               <p:pRg st="7" end="7"/>
-                                            </p:txEl>
-                                          </p:spTgt>
-                                        </p:tgtEl>
-                                      </p:cBhvr>
-                                    </p:animEffect>
-                                  </p:childTnLst>
-                                </p:cTn>
-                              </p:par>
-                            </p:childTnLst>
-                          </p:cTn>
-                        </p:par>
-                      </p:childTnLst>
-                    </p:cTn>
-                  </p:par>
-                  <p:par>
-                    <p:cTn id="33" fill="hold">
-                      <p:stCondLst>
-                        <p:cond delay="indefinite"/>
-                      </p:stCondLst>
-                      <p:childTnLst>
-                        <p:par>
-                          <p:cTn id="34" fill="hold">
-                            <p:stCondLst>
-                              <p:cond delay="0"/>
-                            </p:stCondLst>
-                            <p:childTnLst>
-                              <p:par>
-                                <p:cTn id="35" presetID="10" presetClass="entr" presetSubtype="0" fill="hold" grpId="0" nodeType="clickEffect">
-                                  <p:stCondLst>
-                                    <p:cond delay="0"/>
-                                  </p:stCondLst>
-                                  <p:childTnLst>
-                                    <p:set>
-                                      <p:cBhvr>
-                                        <p:cTn id="36" dur="1" fill="hold">
-                                          <p:stCondLst>
-                                            <p:cond delay="0"/>
-                                          </p:stCondLst>
-                                        </p:cTn>
-                                        <p:tgtEl>
-                                          <p:spTgt spid="3">
-                                            <p:txEl>
-                                              <p:pRg st="9" end="9"/>
-                                            </p:txEl>
-                                          </p:spTgt>
-                                        </p:tgtEl>
-                                        <p:attrNameLst>
-                                          <p:attrName>style.visibility</p:attrName>
-                                        </p:attrNameLst>
-                                      </p:cBhvr>
-                                      <p:to>
-                                        <p:strVal val="visible"/>
-                                      </p:to>
-                                    </p:set>
-                                    <p:animEffect transition="in" filter="fade">
-                                      <p:cBhvr>
-                                        <p:cTn id="37" dur="500"/>
-                                        <p:tgtEl>
-                                          <p:spTgt spid="3">
-                                            <p:txEl>
-                                              <p:pRg st="9" end="9"/>
-                                            </p:txEl>
-                                          </p:spTgt>
-                                        </p:tgtEl>
-                                      </p:cBhvr>
-                                    </p:animEffect>
-                                  </p:childTnLst>
-                                </p:cTn>
-                              </p:par>
-                            </p:childTnLst>
-                          </p:cTn>
-                        </p:par>
-                      </p:childTnLst>
-                    </p:cTn>
-                  </p:par>
-                  <p:par>
-                    <p:cTn id="38" fill="hold">
-                      <p:stCondLst>
-                        <p:cond delay="indefinite"/>
-                      </p:stCondLst>
-                      <p:childTnLst>
-                        <p:par>
-                          <p:cTn id="39" fill="hold">
-                            <p:stCondLst>
-                              <p:cond delay="0"/>
-                            </p:stCondLst>
-                            <p:childTnLst>
-                              <p:par>
-                                <p:cTn id="40" presetID="10" presetClass="entr" presetSubtype="0" fill="hold" grpId="0" nodeType="clickEffect">
-                                  <p:stCondLst>
-                                    <p:cond delay="0"/>
-                                  </p:stCondLst>
-                                  <p:childTnLst>
-                                    <p:set>
-                                      <p:cBhvr>
-                                        <p:cTn id="41" dur="1" fill="hold">
-                                          <p:stCondLst>
-                                            <p:cond delay="0"/>
-                                          </p:stCondLst>
-                                        </p:cTn>
-                                        <p:tgtEl>
-                                          <p:spTgt spid="3">
-                                            <p:txEl>
-                                              <p:pRg st="10" end="10"/>
-                                            </p:txEl>
-                                          </p:spTgt>
-                                        </p:tgtEl>
-                                        <p:attrNameLst>
-                                          <p:attrName>style.visibility</p:attrName>
-                                        </p:attrNameLst>
-                                      </p:cBhvr>
-                                      <p:to>
-                                        <p:strVal val="visible"/>
-                                      </p:to>
-                                    </p:set>
-                                    <p:animEffect transition="in" filter="fade">
-                                      <p:cBhvr>
-                                        <p:cTn id="42" dur="500"/>
-                                        <p:tgtEl>
-                                          <p:spTgt spid="3">
-                                            <p:txEl>
-                                              <p:pRg st="10" end="10"/>
-                                            </p:txEl>
-                                          </p:spTgt>
-                                        </p:tgtEl>
-                                      </p:cBhvr>
-                                    </p:animEffect>
-                                  </p:childTnLst>
-                                </p:cTn>
-                              </p:par>
-                            </p:childTnLst>
-                          </p:cTn>
-                        </p:par>
-                      </p:childTnLst>
-                    </p:cTn>
-                  </p:par>
-                  <p:par>
-                    <p:cTn id="43" fill="hold">
-                      <p:stCondLst>
-                        <p:cond delay="indefinite"/>
-                      </p:stCondLst>
-                      <p:childTnLst>
-                        <p:par>
-                          <p:cTn id="44" fill="hold">
-                            <p:stCondLst>
-                              <p:cond delay="0"/>
-                            </p:stCondLst>
-                            <p:childTnLst>
-                              <p:par>
-                                <p:cTn id="45" presetID="10" presetClass="entr" presetSubtype="0" fill="hold" grpId="0" nodeType="clickEffect">
-                                  <p:stCondLst>
-                                    <p:cond delay="0"/>
-                                  </p:stCondLst>
-                                  <p:childTnLst>
-                                    <p:set>
-                                      <p:cBhvr>
-                                        <p:cTn id="46" dur="1" fill="hold">
-                                          <p:stCondLst>
-                                            <p:cond delay="0"/>
-                                          </p:stCondLst>
-                                        </p:cTn>
-                                        <p:tgtEl>
-                                          <p:spTgt spid="3">
-                                            <p:txEl>
-                                              <p:pRg st="12" end="12"/>
-                                            </p:txEl>
-                                          </p:spTgt>
-                                        </p:tgtEl>
-                                        <p:attrNameLst>
-                                          <p:attrName>style.visibility</p:attrName>
-                                        </p:attrNameLst>
-                                      </p:cBhvr>
-                                      <p:to>
-                                        <p:strVal val="visible"/>
-                                      </p:to>
-                                    </p:set>
-                                    <p:animEffect transition="in" filter="fade">
-                                      <p:cBhvr>
-                                        <p:cTn id="47" dur="500"/>
-                                        <p:tgtEl>
-                                          <p:spTgt spid="3">
-                                            <p:txEl>
-                                              <p:pRg st="12" end="12"/>
-                                            </p:txEl>
-                                          </p:spTgt>
-                                        </p:tgtEl>
-                                      </p:cBhvr>
-                                    </p:animEffect>
-                                  </p:childTnLst>
-                                </p:cTn>
-                              </p:par>
-                            </p:childTnLst>
-                          </p:cTn>
-                        </p:par>
-                      </p:childTnLst>
-                    </p:cTn>
-                  </p:par>
-                  <p:par>
-                    <p:cTn id="48" fill="hold">
-                      <p:stCondLst>
-                        <p:cond delay="indefinite"/>
-                      </p:stCondLst>
-                      <p:childTnLst>
-                        <p:par>
-                          <p:cTn id="49" fill="hold">
-                            <p:stCondLst>
-                              <p:cond delay="0"/>
-                            </p:stCondLst>
-                            <p:childTnLst>
-                              <p:par>
-                                <p:cTn id="50" presetID="10" presetClass="entr" presetSubtype="0" fill="hold" grpId="0" nodeType="clickEffect">
-                                  <p:stCondLst>
-                                    <p:cond delay="0"/>
-                                  </p:stCondLst>
-                                  <p:childTnLst>
-                                    <p:set>
-                                      <p:cBhvr>
-                                        <p:cTn id="51" dur="1" fill="hold">
-                                          <p:stCondLst>
-                                            <p:cond delay="0"/>
-                                          </p:stCondLst>
-                                        </p:cTn>
-                                        <p:tgtEl>
-                                          <p:spTgt spid="3">
-                                            <p:txEl>
-                                              <p:pRg st="13" end="13"/>
-                                            </p:txEl>
-                                          </p:spTgt>
-                                        </p:tgtEl>
-                                        <p:attrNameLst>
-                                          <p:attrName>style.visibility</p:attrName>
-                                        </p:attrNameLst>
-                                      </p:cBhvr>
-                                      <p:to>
-                                        <p:strVal val="visible"/>
-                                      </p:to>
-                                    </p:set>
-                                    <p:animEffect transition="in" filter="fade">
-                                      <p:cBhvr>
-                                        <p:cTn id="52" dur="500"/>
-                                        <p:tgtEl>
-                                          <p:spTgt spid="3">
-                                            <p:txEl>
-                                              <p:pRg st="13" end="13"/>
                                             </p:txEl>
                                           </p:spTgt>
                                         </p:tgtEl>

--- a/presentation/prompt-engineering-content.pptx
+++ b/presentation/prompt-engineering-content.pptx
@@ -14386,7 +14386,7 @@
               <a:buNone/>
             </a:pPr>
             <a:r>
-              <a:rPr lang="en-US" sz="1300" b="1"/>
+              <a:rPr lang="en-US" sz="1300" b="1" dirty="0"/>
               <a:t>Illusion of Reasoning</a:t>
             </a:r>
           </a:p>
@@ -14395,7 +14395,7 @@
               <a:buNone/>
             </a:pPr>
             <a:r>
-              <a:rPr lang="en-US" sz="1300"/>
+              <a:rPr lang="en-US" sz="1300" dirty="0"/>
               <a:t>LLMs generate responses that seem intelligent but do not reflect true understanding.</a:t>
             </a:r>
           </a:p>
@@ -14407,7 +14407,7 @@
               <a:buNone/>
             </a:pPr>
             <a:r>
-              <a:rPr lang="en-US" sz="1300" b="1"/>
+              <a:rPr lang="en-US" sz="1300" b="1" dirty="0"/>
               <a:t>Hallucination with Authority</a:t>
             </a:r>
           </a:p>
@@ -14416,7 +14416,7 @@
               <a:buNone/>
             </a:pPr>
             <a:r>
-              <a:rPr lang="en-US" sz="1300"/>
+              <a:rPr lang="en-US" sz="1300" dirty="0"/>
               <a:t>LLMs can and do present invented facts, citations, and data with confidence.  They do not internally distinguish between accurate and fabricated information.</a:t>
             </a:r>
           </a:p>
@@ -14428,7 +14428,7 @@
               <a:buNone/>
             </a:pPr>
             <a:r>
-              <a:rPr lang="en-US" sz="1300" b="1"/>
+              <a:rPr lang="en-US" sz="1300" b="1" dirty="0"/>
               <a:t>Contextual Amnesia</a:t>
             </a:r>
           </a:p>
@@ -14437,7 +14437,7 @@
               <a:buNone/>
             </a:pPr>
             <a:r>
-              <a:rPr lang="en-US" sz="1300"/>
+              <a:rPr lang="en-US" sz="1300" dirty="0"/>
               <a:t>LLMs, with some exceptions, cannot learn from previous conversations.  Limited context windows create “forgetting” mid-conversation.</a:t>
             </a:r>
           </a:p>
@@ -14449,7 +14449,7 @@
               <a:buNone/>
             </a:pPr>
             <a:r>
-              <a:rPr lang="en-US" sz="1300" b="1"/>
+              <a:rPr lang="en-US" sz="1300" b="1" dirty="0"/>
               <a:t>Inconsistent Expertise</a:t>
             </a:r>
           </a:p>
@@ -14458,7 +14458,7 @@
               <a:buNone/>
             </a:pPr>
             <a:r>
-              <a:rPr lang="en-US" sz="1300"/>
+              <a:rPr lang="en-US" sz="1300" dirty="0"/>
               <a:t>LLMs sometimes excel at complex tasks while failing hilariously at simple ones.  They also provide different responses to identical questions asked differently.</a:t>
             </a:r>
           </a:p>
@@ -14470,7 +14470,7 @@
               <a:buNone/>
             </a:pPr>
             <a:r>
-              <a:rPr lang="en-US" sz="1300" b="1"/>
+              <a:rPr lang="en-US" sz="1300" b="1" dirty="0"/>
               <a:t>The Anthropomorphism Trap</a:t>
             </a:r>
           </a:p>
@@ -14479,7 +14479,7 @@
               <a:buNone/>
             </a:pPr>
             <a:r>
-              <a:rPr lang="en-US" sz="1300"/>
+              <a:rPr lang="en-US" sz="1300" dirty="0"/>
               <a:t>Human-like conversations can trigger emotional attribution.  Users assume intent, feelings, or preferences that don’t exist.</a:t>
             </a:r>
           </a:p>
@@ -14491,7 +14491,7 @@
               <a:buNone/>
             </a:pPr>
             <a:r>
-              <a:rPr lang="en-US" sz="1300" b="1"/>
+              <a:rPr lang="en-US" sz="1300" b="1" dirty="0"/>
               <a:t>Probabilistic vs. Deterministic Thinking</a:t>
             </a:r>
           </a:p>
@@ -14500,7 +14500,7 @@
               <a:buNone/>
             </a:pPr>
             <a:r>
-              <a:rPr lang="en-US" sz="1300"/>
+              <a:rPr lang="en-US" sz="1300" dirty="0"/>
               <a:t>Models generate “likely” responses, not calculated answers.  Each response is a statistical prediction, not a logical deduction.</a:t>
             </a:r>
           </a:p>
@@ -14519,6 +14519,663 @@
   <p:transition>
     <p:fade/>
   </p:transition>
+  <p:timing>
+    <p:tnLst>
+      <p:par>
+        <p:cTn id="1" dur="indefinite" restart="never" nodeType="tmRoot">
+          <p:childTnLst>
+            <p:seq concurrent="1" nextAc="seek">
+              <p:cTn id="2" dur="indefinite" nodeType="mainSeq">
+                <p:childTnLst>
+                  <p:par>
+                    <p:cTn id="3" fill="hold">
+                      <p:stCondLst>
+                        <p:cond delay="indefinite"/>
+                      </p:stCondLst>
+                      <p:childTnLst>
+                        <p:par>
+                          <p:cTn id="4" fill="hold">
+                            <p:stCondLst>
+                              <p:cond delay="0"/>
+                            </p:stCondLst>
+                            <p:childTnLst>
+                              <p:par>
+                                <p:cTn id="5" presetID="10" presetClass="entr" presetSubtype="0" fill="hold" grpId="0" nodeType="clickEffect">
+                                  <p:stCondLst>
+                                    <p:cond delay="0"/>
+                                  </p:stCondLst>
+                                  <p:childTnLst>
+                                    <p:set>
+                                      <p:cBhvr>
+                                        <p:cTn id="6" dur="1" fill="hold">
+                                          <p:stCondLst>
+                                            <p:cond delay="0"/>
+                                          </p:stCondLst>
+                                        </p:cTn>
+                                        <p:tgtEl>
+                                          <p:spTgt spid="4">
+                                            <p:txEl>
+                                              <p:pRg st="0" end="0"/>
+                                            </p:txEl>
+                                          </p:spTgt>
+                                        </p:tgtEl>
+                                        <p:attrNameLst>
+                                          <p:attrName>style.visibility</p:attrName>
+                                        </p:attrNameLst>
+                                      </p:cBhvr>
+                                      <p:to>
+                                        <p:strVal val="visible"/>
+                                      </p:to>
+                                    </p:set>
+                                    <p:animEffect transition="in" filter="fade">
+                                      <p:cBhvr>
+                                        <p:cTn id="7" dur="500"/>
+                                        <p:tgtEl>
+                                          <p:spTgt spid="4">
+                                            <p:txEl>
+                                              <p:pRg st="0" end="0"/>
+                                            </p:txEl>
+                                          </p:spTgt>
+                                        </p:tgtEl>
+                                      </p:cBhvr>
+                                    </p:animEffect>
+                                  </p:childTnLst>
+                                </p:cTn>
+                              </p:par>
+                              <p:par>
+                                <p:cTn id="8" presetID="10" presetClass="entr" presetSubtype="0" fill="hold" grpId="0" nodeType="withEffect">
+                                  <p:stCondLst>
+                                    <p:cond delay="0"/>
+                                  </p:stCondLst>
+                                  <p:childTnLst>
+                                    <p:set>
+                                      <p:cBhvr>
+                                        <p:cTn id="9" dur="1" fill="hold">
+                                          <p:stCondLst>
+                                            <p:cond delay="0"/>
+                                          </p:stCondLst>
+                                        </p:cTn>
+                                        <p:tgtEl>
+                                          <p:spTgt spid="4">
+                                            <p:txEl>
+                                              <p:pRg st="1" end="1"/>
+                                            </p:txEl>
+                                          </p:spTgt>
+                                        </p:tgtEl>
+                                        <p:attrNameLst>
+                                          <p:attrName>style.visibility</p:attrName>
+                                        </p:attrNameLst>
+                                      </p:cBhvr>
+                                      <p:to>
+                                        <p:strVal val="visible"/>
+                                      </p:to>
+                                    </p:set>
+                                    <p:animEffect transition="in" filter="fade">
+                                      <p:cBhvr>
+                                        <p:cTn id="10" dur="500"/>
+                                        <p:tgtEl>
+                                          <p:spTgt spid="4">
+                                            <p:txEl>
+                                              <p:pRg st="1" end="1"/>
+                                            </p:txEl>
+                                          </p:spTgt>
+                                        </p:tgtEl>
+                                      </p:cBhvr>
+                                    </p:animEffect>
+                                  </p:childTnLst>
+                                </p:cTn>
+                              </p:par>
+                            </p:childTnLst>
+                          </p:cTn>
+                        </p:par>
+                      </p:childTnLst>
+                    </p:cTn>
+                  </p:par>
+                  <p:par>
+                    <p:cTn id="11" fill="hold">
+                      <p:stCondLst>
+                        <p:cond delay="indefinite"/>
+                      </p:stCondLst>
+                      <p:childTnLst>
+                        <p:par>
+                          <p:cTn id="12" fill="hold">
+                            <p:stCondLst>
+                              <p:cond delay="0"/>
+                            </p:stCondLst>
+                            <p:childTnLst>
+                              <p:par>
+                                <p:cTn id="13" presetID="10" presetClass="entr" presetSubtype="0" fill="hold" grpId="0" nodeType="clickEffect">
+                                  <p:stCondLst>
+                                    <p:cond delay="0"/>
+                                  </p:stCondLst>
+                                  <p:childTnLst>
+                                    <p:set>
+                                      <p:cBhvr>
+                                        <p:cTn id="14" dur="1" fill="hold">
+                                          <p:stCondLst>
+                                            <p:cond delay="0"/>
+                                          </p:stCondLst>
+                                        </p:cTn>
+                                        <p:tgtEl>
+                                          <p:spTgt spid="4">
+                                            <p:txEl>
+                                              <p:pRg st="2" end="2"/>
+                                            </p:txEl>
+                                          </p:spTgt>
+                                        </p:tgtEl>
+                                        <p:attrNameLst>
+                                          <p:attrName>style.visibility</p:attrName>
+                                        </p:attrNameLst>
+                                      </p:cBhvr>
+                                      <p:to>
+                                        <p:strVal val="visible"/>
+                                      </p:to>
+                                    </p:set>
+                                    <p:animEffect transition="in" filter="fade">
+                                      <p:cBhvr>
+                                        <p:cTn id="15" dur="500"/>
+                                        <p:tgtEl>
+                                          <p:spTgt spid="4">
+                                            <p:txEl>
+                                              <p:pRg st="2" end="2"/>
+                                            </p:txEl>
+                                          </p:spTgt>
+                                        </p:tgtEl>
+                                      </p:cBhvr>
+                                    </p:animEffect>
+                                  </p:childTnLst>
+                                </p:cTn>
+                              </p:par>
+                              <p:par>
+                                <p:cTn id="16" presetID="10" presetClass="entr" presetSubtype="0" fill="hold" grpId="0" nodeType="withEffect">
+                                  <p:stCondLst>
+                                    <p:cond delay="0"/>
+                                  </p:stCondLst>
+                                  <p:childTnLst>
+                                    <p:set>
+                                      <p:cBhvr>
+                                        <p:cTn id="17" dur="1" fill="hold">
+                                          <p:stCondLst>
+                                            <p:cond delay="0"/>
+                                          </p:stCondLst>
+                                        </p:cTn>
+                                        <p:tgtEl>
+                                          <p:spTgt spid="4">
+                                            <p:txEl>
+                                              <p:pRg st="3" end="3"/>
+                                            </p:txEl>
+                                          </p:spTgt>
+                                        </p:tgtEl>
+                                        <p:attrNameLst>
+                                          <p:attrName>style.visibility</p:attrName>
+                                        </p:attrNameLst>
+                                      </p:cBhvr>
+                                      <p:to>
+                                        <p:strVal val="visible"/>
+                                      </p:to>
+                                    </p:set>
+                                    <p:animEffect transition="in" filter="fade">
+                                      <p:cBhvr>
+                                        <p:cTn id="18" dur="500"/>
+                                        <p:tgtEl>
+                                          <p:spTgt spid="4">
+                                            <p:txEl>
+                                              <p:pRg st="3" end="3"/>
+                                            </p:txEl>
+                                          </p:spTgt>
+                                        </p:tgtEl>
+                                      </p:cBhvr>
+                                    </p:animEffect>
+                                  </p:childTnLst>
+                                </p:cTn>
+                              </p:par>
+                            </p:childTnLst>
+                          </p:cTn>
+                        </p:par>
+                      </p:childTnLst>
+                    </p:cTn>
+                  </p:par>
+                  <p:par>
+                    <p:cTn id="19" fill="hold">
+                      <p:stCondLst>
+                        <p:cond delay="indefinite"/>
+                      </p:stCondLst>
+                      <p:childTnLst>
+                        <p:par>
+                          <p:cTn id="20" fill="hold">
+                            <p:stCondLst>
+                              <p:cond delay="0"/>
+                            </p:stCondLst>
+                            <p:childTnLst>
+                              <p:par>
+                                <p:cTn id="21" presetID="10" presetClass="entr" presetSubtype="0" fill="hold" grpId="0" nodeType="clickEffect">
+                                  <p:stCondLst>
+                                    <p:cond delay="0"/>
+                                  </p:stCondLst>
+                                  <p:childTnLst>
+                                    <p:set>
+                                      <p:cBhvr>
+                                        <p:cTn id="22" dur="1" fill="hold">
+                                          <p:stCondLst>
+                                            <p:cond delay="0"/>
+                                          </p:stCondLst>
+                                        </p:cTn>
+                                        <p:tgtEl>
+                                          <p:spTgt spid="4">
+                                            <p:txEl>
+                                              <p:pRg st="4" end="4"/>
+                                            </p:txEl>
+                                          </p:spTgt>
+                                        </p:tgtEl>
+                                        <p:attrNameLst>
+                                          <p:attrName>style.visibility</p:attrName>
+                                        </p:attrNameLst>
+                                      </p:cBhvr>
+                                      <p:to>
+                                        <p:strVal val="visible"/>
+                                      </p:to>
+                                    </p:set>
+                                    <p:animEffect transition="in" filter="fade">
+                                      <p:cBhvr>
+                                        <p:cTn id="23" dur="500"/>
+                                        <p:tgtEl>
+                                          <p:spTgt spid="4">
+                                            <p:txEl>
+                                              <p:pRg st="4" end="4"/>
+                                            </p:txEl>
+                                          </p:spTgt>
+                                        </p:tgtEl>
+                                      </p:cBhvr>
+                                    </p:animEffect>
+                                  </p:childTnLst>
+                                </p:cTn>
+                              </p:par>
+                              <p:par>
+                                <p:cTn id="24" presetID="10" presetClass="entr" presetSubtype="0" fill="hold" grpId="0" nodeType="withEffect">
+                                  <p:stCondLst>
+                                    <p:cond delay="0"/>
+                                  </p:stCondLst>
+                                  <p:childTnLst>
+                                    <p:set>
+                                      <p:cBhvr>
+                                        <p:cTn id="25" dur="1" fill="hold">
+                                          <p:stCondLst>
+                                            <p:cond delay="0"/>
+                                          </p:stCondLst>
+                                        </p:cTn>
+                                        <p:tgtEl>
+                                          <p:spTgt spid="4">
+                                            <p:txEl>
+                                              <p:pRg st="5" end="5"/>
+                                            </p:txEl>
+                                          </p:spTgt>
+                                        </p:tgtEl>
+                                        <p:attrNameLst>
+                                          <p:attrName>style.visibility</p:attrName>
+                                        </p:attrNameLst>
+                                      </p:cBhvr>
+                                      <p:to>
+                                        <p:strVal val="visible"/>
+                                      </p:to>
+                                    </p:set>
+                                    <p:animEffect transition="in" filter="fade">
+                                      <p:cBhvr>
+                                        <p:cTn id="26" dur="500"/>
+                                        <p:tgtEl>
+                                          <p:spTgt spid="4">
+                                            <p:txEl>
+                                              <p:pRg st="5" end="5"/>
+                                            </p:txEl>
+                                          </p:spTgt>
+                                        </p:tgtEl>
+                                      </p:cBhvr>
+                                    </p:animEffect>
+                                  </p:childTnLst>
+                                </p:cTn>
+                              </p:par>
+                            </p:childTnLst>
+                          </p:cTn>
+                        </p:par>
+                      </p:childTnLst>
+                    </p:cTn>
+                  </p:par>
+                  <p:par>
+                    <p:cTn id="27" fill="hold">
+                      <p:stCondLst>
+                        <p:cond delay="indefinite"/>
+                      </p:stCondLst>
+                      <p:childTnLst>
+                        <p:par>
+                          <p:cTn id="28" fill="hold">
+                            <p:stCondLst>
+                              <p:cond delay="0"/>
+                            </p:stCondLst>
+                            <p:childTnLst>
+                              <p:par>
+                                <p:cTn id="29" presetID="10" presetClass="entr" presetSubtype="0" fill="hold" grpId="0" nodeType="clickEffect">
+                                  <p:stCondLst>
+                                    <p:cond delay="0"/>
+                                  </p:stCondLst>
+                                  <p:childTnLst>
+                                    <p:set>
+                                      <p:cBhvr>
+                                        <p:cTn id="30" dur="1" fill="hold">
+                                          <p:stCondLst>
+                                            <p:cond delay="0"/>
+                                          </p:stCondLst>
+                                        </p:cTn>
+                                        <p:tgtEl>
+                                          <p:spTgt spid="4">
+                                            <p:txEl>
+                                              <p:pRg st="6" end="6"/>
+                                            </p:txEl>
+                                          </p:spTgt>
+                                        </p:tgtEl>
+                                        <p:attrNameLst>
+                                          <p:attrName>style.visibility</p:attrName>
+                                        </p:attrNameLst>
+                                      </p:cBhvr>
+                                      <p:to>
+                                        <p:strVal val="visible"/>
+                                      </p:to>
+                                    </p:set>
+                                    <p:animEffect transition="in" filter="fade">
+                                      <p:cBhvr>
+                                        <p:cTn id="31" dur="500"/>
+                                        <p:tgtEl>
+                                          <p:spTgt spid="4">
+                                            <p:txEl>
+                                              <p:pRg st="6" end="6"/>
+                                            </p:txEl>
+                                          </p:spTgt>
+                                        </p:tgtEl>
+                                      </p:cBhvr>
+                                    </p:animEffect>
+                                  </p:childTnLst>
+                                </p:cTn>
+                              </p:par>
+                              <p:par>
+                                <p:cTn id="32" presetID="10" presetClass="entr" presetSubtype="0" fill="hold" grpId="0" nodeType="withEffect">
+                                  <p:stCondLst>
+                                    <p:cond delay="0"/>
+                                  </p:stCondLst>
+                                  <p:childTnLst>
+                                    <p:set>
+                                      <p:cBhvr>
+                                        <p:cTn id="33" dur="1" fill="hold">
+                                          <p:stCondLst>
+                                            <p:cond delay="0"/>
+                                          </p:stCondLst>
+                                        </p:cTn>
+                                        <p:tgtEl>
+                                          <p:spTgt spid="4">
+                                            <p:txEl>
+                                              <p:pRg st="7" end="7"/>
+                                            </p:txEl>
+                                          </p:spTgt>
+                                        </p:tgtEl>
+                                        <p:attrNameLst>
+                                          <p:attrName>style.visibility</p:attrName>
+                                        </p:attrNameLst>
+                                      </p:cBhvr>
+                                      <p:to>
+                                        <p:strVal val="visible"/>
+                                      </p:to>
+                                    </p:set>
+                                    <p:animEffect transition="in" filter="fade">
+                                      <p:cBhvr>
+                                        <p:cTn id="34" dur="500"/>
+                                        <p:tgtEl>
+                                          <p:spTgt spid="4">
+                                            <p:txEl>
+                                              <p:pRg st="7" end="7"/>
+                                            </p:txEl>
+                                          </p:spTgt>
+                                        </p:tgtEl>
+                                      </p:cBhvr>
+                                    </p:animEffect>
+                                  </p:childTnLst>
+                                </p:cTn>
+                              </p:par>
+                            </p:childTnLst>
+                          </p:cTn>
+                        </p:par>
+                      </p:childTnLst>
+                    </p:cTn>
+                  </p:par>
+                  <p:par>
+                    <p:cTn id="35" fill="hold">
+                      <p:stCondLst>
+                        <p:cond delay="indefinite"/>
+                      </p:stCondLst>
+                      <p:childTnLst>
+                        <p:par>
+                          <p:cTn id="36" fill="hold">
+                            <p:stCondLst>
+                              <p:cond delay="0"/>
+                            </p:stCondLst>
+                            <p:childTnLst>
+                              <p:par>
+                                <p:cTn id="37" presetID="10" presetClass="entr" presetSubtype="0" fill="hold" grpId="0" nodeType="clickEffect">
+                                  <p:stCondLst>
+                                    <p:cond delay="0"/>
+                                  </p:stCondLst>
+                                  <p:childTnLst>
+                                    <p:set>
+                                      <p:cBhvr>
+                                        <p:cTn id="38" dur="1" fill="hold">
+                                          <p:stCondLst>
+                                            <p:cond delay="0"/>
+                                          </p:stCondLst>
+                                        </p:cTn>
+                                        <p:tgtEl>
+                                          <p:spTgt spid="4">
+                                            <p:txEl>
+                                              <p:pRg st="8" end="8"/>
+                                            </p:txEl>
+                                          </p:spTgt>
+                                        </p:tgtEl>
+                                        <p:attrNameLst>
+                                          <p:attrName>style.visibility</p:attrName>
+                                        </p:attrNameLst>
+                                      </p:cBhvr>
+                                      <p:to>
+                                        <p:strVal val="visible"/>
+                                      </p:to>
+                                    </p:set>
+                                    <p:animEffect transition="in" filter="fade">
+                                      <p:cBhvr>
+                                        <p:cTn id="39" dur="500"/>
+                                        <p:tgtEl>
+                                          <p:spTgt spid="4">
+                                            <p:txEl>
+                                              <p:pRg st="8" end="8"/>
+                                            </p:txEl>
+                                          </p:spTgt>
+                                        </p:tgtEl>
+                                      </p:cBhvr>
+                                    </p:animEffect>
+                                  </p:childTnLst>
+                                </p:cTn>
+                              </p:par>
+                              <p:par>
+                                <p:cTn id="40" presetID="10" presetClass="entr" presetSubtype="0" fill="hold" grpId="0" nodeType="withEffect">
+                                  <p:stCondLst>
+                                    <p:cond delay="0"/>
+                                  </p:stCondLst>
+                                  <p:childTnLst>
+                                    <p:set>
+                                      <p:cBhvr>
+                                        <p:cTn id="41" dur="1" fill="hold">
+                                          <p:stCondLst>
+                                            <p:cond delay="0"/>
+                                          </p:stCondLst>
+                                        </p:cTn>
+                                        <p:tgtEl>
+                                          <p:spTgt spid="4">
+                                            <p:txEl>
+                                              <p:pRg st="9" end="9"/>
+                                            </p:txEl>
+                                          </p:spTgt>
+                                        </p:tgtEl>
+                                        <p:attrNameLst>
+                                          <p:attrName>style.visibility</p:attrName>
+                                        </p:attrNameLst>
+                                      </p:cBhvr>
+                                      <p:to>
+                                        <p:strVal val="visible"/>
+                                      </p:to>
+                                    </p:set>
+                                    <p:animEffect transition="in" filter="fade">
+                                      <p:cBhvr>
+                                        <p:cTn id="42" dur="500"/>
+                                        <p:tgtEl>
+                                          <p:spTgt spid="4">
+                                            <p:txEl>
+                                              <p:pRg st="9" end="9"/>
+                                            </p:txEl>
+                                          </p:spTgt>
+                                        </p:tgtEl>
+                                      </p:cBhvr>
+                                    </p:animEffect>
+                                  </p:childTnLst>
+                                </p:cTn>
+                              </p:par>
+                            </p:childTnLst>
+                          </p:cTn>
+                        </p:par>
+                      </p:childTnLst>
+                    </p:cTn>
+                  </p:par>
+                  <p:par>
+                    <p:cTn id="43" fill="hold">
+                      <p:stCondLst>
+                        <p:cond delay="indefinite"/>
+                      </p:stCondLst>
+                      <p:childTnLst>
+                        <p:par>
+                          <p:cTn id="44" fill="hold">
+                            <p:stCondLst>
+                              <p:cond delay="0"/>
+                            </p:stCondLst>
+                            <p:childTnLst>
+                              <p:par>
+                                <p:cTn id="45" presetID="10" presetClass="entr" presetSubtype="0" fill="hold" grpId="0" nodeType="clickEffect">
+                                  <p:stCondLst>
+                                    <p:cond delay="0"/>
+                                  </p:stCondLst>
+                                  <p:childTnLst>
+                                    <p:set>
+                                      <p:cBhvr>
+                                        <p:cTn id="46" dur="1" fill="hold">
+                                          <p:stCondLst>
+                                            <p:cond delay="0"/>
+                                          </p:stCondLst>
+                                        </p:cTn>
+                                        <p:tgtEl>
+                                          <p:spTgt spid="4">
+                                            <p:txEl>
+                                              <p:pRg st="10" end="10"/>
+                                            </p:txEl>
+                                          </p:spTgt>
+                                        </p:tgtEl>
+                                        <p:attrNameLst>
+                                          <p:attrName>style.visibility</p:attrName>
+                                        </p:attrNameLst>
+                                      </p:cBhvr>
+                                      <p:to>
+                                        <p:strVal val="visible"/>
+                                      </p:to>
+                                    </p:set>
+                                    <p:animEffect transition="in" filter="fade">
+                                      <p:cBhvr>
+                                        <p:cTn id="47" dur="500"/>
+                                        <p:tgtEl>
+                                          <p:spTgt spid="4">
+                                            <p:txEl>
+                                              <p:pRg st="10" end="10"/>
+                                            </p:txEl>
+                                          </p:spTgt>
+                                        </p:tgtEl>
+                                      </p:cBhvr>
+                                    </p:animEffect>
+                                  </p:childTnLst>
+                                </p:cTn>
+                              </p:par>
+                              <p:par>
+                                <p:cTn id="48" presetID="10" presetClass="entr" presetSubtype="0" fill="hold" grpId="0" nodeType="withEffect">
+                                  <p:stCondLst>
+                                    <p:cond delay="0"/>
+                                  </p:stCondLst>
+                                  <p:childTnLst>
+                                    <p:set>
+                                      <p:cBhvr>
+                                        <p:cTn id="49" dur="1" fill="hold">
+                                          <p:stCondLst>
+                                            <p:cond delay="0"/>
+                                          </p:stCondLst>
+                                        </p:cTn>
+                                        <p:tgtEl>
+                                          <p:spTgt spid="4">
+                                            <p:txEl>
+                                              <p:pRg st="11" end="11"/>
+                                            </p:txEl>
+                                          </p:spTgt>
+                                        </p:tgtEl>
+                                        <p:attrNameLst>
+                                          <p:attrName>style.visibility</p:attrName>
+                                        </p:attrNameLst>
+                                      </p:cBhvr>
+                                      <p:to>
+                                        <p:strVal val="visible"/>
+                                      </p:to>
+                                    </p:set>
+                                    <p:animEffect transition="in" filter="fade">
+                                      <p:cBhvr>
+                                        <p:cTn id="50" dur="500"/>
+                                        <p:tgtEl>
+                                          <p:spTgt spid="4">
+                                            <p:txEl>
+                                              <p:pRg st="11" end="11"/>
+                                            </p:txEl>
+                                          </p:spTgt>
+                                        </p:tgtEl>
+                                      </p:cBhvr>
+                                    </p:animEffect>
+                                  </p:childTnLst>
+                                </p:cTn>
+                              </p:par>
+                            </p:childTnLst>
+                          </p:cTn>
+                        </p:par>
+                      </p:childTnLst>
+                    </p:cTn>
+                  </p:par>
+                </p:childTnLst>
+              </p:cTn>
+              <p:prevCondLst>
+                <p:cond evt="onPrev" delay="0">
+                  <p:tgtEl>
+                    <p:sldTgt/>
+                  </p:tgtEl>
+                </p:cond>
+              </p:prevCondLst>
+              <p:nextCondLst>
+                <p:cond evt="onNext" delay="0">
+                  <p:tgtEl>
+                    <p:sldTgt/>
+                  </p:tgtEl>
+                </p:cond>
+              </p:nextCondLst>
+            </p:seq>
+          </p:childTnLst>
+        </p:cTn>
+      </p:par>
+    </p:tnLst>
+    <p:bldLst>
+      <p:bldP spid="4" grpId="0" build="p"/>
+    </p:bldLst>
+  </p:timing>
 </p:sld>
 </file>
 
